--- a/figures/cue_accumulation/hierarchical_cue_task.pptx
+++ b/figures/cue_accumulation/hierarchical_cue_task.pptx
@@ -7,7 +7,7 @@
   <p:sldIdLst>
     <p:sldId id="256" r:id="rId7"/>
   </p:sldIdLst>
-  <p:sldSz cx="12446000" cy="7366000" type="screen4x3"/>
+  <p:sldSz cx="12192000" cy="6858000" type="screen4x3"/>
   <p:notesSz cx="6858000" cy="9144000"/>
   <p:defaultTextStyle>
     <a:defPPr>
@@ -3096,8 +3096,8 @@
         </p:nvSpPr>
         <p:spPr>
           <a:xfrm>
-            <a:off x="3597021" y="118110"/>
-            <a:ext cx="5251958" cy="525780"/>
+            <a:off x="3814114" y="331233"/>
+            <a:ext cx="4563770" cy="456884"/>
           </a:xfrm>
           <a:prstGeom prst="rect">
             <a:avLst/>
@@ -3113,7 +3113,7 @@
           <a:p>
             <a:pPr algn="ctr"/>
             <a:r>
-              <a:rPr sz="2300" b="1" i="0">
+              <a:rPr sz="1998" b="1" i="0">
                 <a:solidFill>
                   <a:srgbClr val="3F3F3F"/>
                 </a:solidFill>
@@ -3132,8 +3132,8 @@
         </p:nvSpPr>
         <p:spPr>
           <a:xfrm>
-            <a:off x="1923796" y="549910"/>
-            <a:ext cx="8598408" cy="297180"/>
+            <a:off x="2360139" y="706452"/>
+            <a:ext cx="7471720" cy="258239"/>
           </a:xfrm>
           <a:prstGeom prst="rect">
             <a:avLst/>
@@ -3149,7 +3149,7 @@
           <a:p>
             <a:pPr algn="ctr"/>
             <a:r>
-              <a:rPr sz="1300" b="0" i="1">
+              <a:rPr sz="1129" b="0" i="1">
                 <a:solidFill>
                   <a:srgbClr val="666666"/>
                 </a:solidFill>
@@ -3168,8 +3168,8 @@
         </p:nvSpPr>
         <p:spPr>
           <a:xfrm>
-            <a:off x="889000" y="1016000"/>
-            <a:ext cx="5969000" cy="2184400"/>
+            <a:off x="1460937" y="1111468"/>
+            <a:ext cx="5186855" cy="1898168"/>
           </a:xfrm>
           <a:prstGeom prst="roundRect">
             <a:avLst/>
@@ -3177,7 +3177,7 @@
           <a:solidFill>
             <a:srgbClr val="FBFBFD"/>
           </a:solidFill>
-          <a:ln w="15240">
+          <a:ln w="13243">
             <a:solidFill>
               <a:srgbClr val="CFCFCF"/>
             </a:solidFill>
@@ -3214,8 +3214,8 @@
         </p:nvSpPr>
         <p:spPr>
           <a:xfrm>
-            <a:off x="2219960" y="1149350"/>
-            <a:ext cx="3307079" cy="342900"/>
+            <a:off x="2617496" y="1227345"/>
+            <a:ext cx="2873738" cy="297968"/>
           </a:xfrm>
           <a:prstGeom prst="rect">
             <a:avLst/>
@@ -3231,7 +3231,7 @@
           <a:p>
             <a:pPr algn="ctr"/>
             <a:r>
-              <a:rPr sz="1500" b="1" i="0">
+              <a:rPr sz="1303" b="1" i="0">
                 <a:solidFill>
                   <a:srgbClr val="3F3F3F"/>
                 </a:solidFill>
@@ -3250,8 +3250,8 @@
         </p:nvCxnSpPr>
         <p:spPr>
           <a:xfrm>
-            <a:off x="1879600" y="2032000"/>
-            <a:ext cx="1066800" cy="0"/>
+            <a:off x="2321735" y="1994337"/>
+            <a:ext cx="927012" cy="0"/>
           </a:xfrm>
           <a:prstGeom prst="line">
             <a:avLst/>
@@ -3286,8 +3286,8 @@
         </p:nvSpPr>
         <p:spPr>
           <a:xfrm>
-            <a:off x="25483820000" y="22096730000"/>
-            <a:ext cx="10322560000" cy="7419340000"/>
+            <a:off x="2438400" y="1739900"/>
+            <a:ext cx="698500" cy="508000"/>
           </a:xfrm>
           <a:custGeom>
             <a:avLst/>
@@ -3296,24 +3296,24 @@
             <a:cxnLst/>
             <a:rect l="l" t="t" r="r" b="b"/>
             <a:pathLst>
-              <a:path w="812800" h="584200">
+              <a:path w="55" h="40">
                 <a:moveTo>
-                  <a:pt x="0" y="292100"/>
+                  <a:pt x="0" y="20"/>
                 </a:moveTo>
                 <a:lnTo>
-                  <a:pt x="0" y="584200"/>
+                  <a:pt x="0" y="40"/>
                 </a:lnTo>
                 <a:lnTo>
-                  <a:pt x="812800" y="0"/>
+                  <a:pt x="55" y="0"/>
                 </a:lnTo>
                 <a:lnTo>
-                  <a:pt x="812800" y="292100"/>
+                  <a:pt x="55" y="20"/>
                 </a:lnTo>
               </a:path>
             </a:pathLst>
           </a:custGeom>
           <a:noFill/>
-          <a:ln w="33020">
+          <a:ln w="28693">
             <a:solidFill>
               <a:srgbClr val="4C78A8"/>
             </a:solidFill>
@@ -3350,8 +3350,8 @@
         </p:nvSpPr>
         <p:spPr>
           <a:xfrm>
-            <a:off x="1952370" y="2442210"/>
-            <a:ext cx="921258" cy="297180"/>
+            <a:off x="2384970" y="2350796"/>
+            <a:ext cx="800541" cy="258239"/>
           </a:xfrm>
           <a:prstGeom prst="rect">
             <a:avLst/>
@@ -3367,7 +3367,7 @@
           <a:p>
             <a:pPr algn="ctr"/>
             <a:r>
-              <a:rPr sz="1300" b="1" i="0">
+              <a:rPr sz="1129" b="1" i="0">
                 <a:solidFill>
                   <a:srgbClr val="4C78A8"/>
                 </a:solidFill>
@@ -3386,8 +3386,8 @@
         </p:nvCxnSpPr>
         <p:spPr>
           <a:xfrm>
-            <a:off x="4546600" y="2032000"/>
-            <a:ext cx="1066800" cy="0"/>
+            <a:off x="4639266" y="1994337"/>
+            <a:ext cx="927012" cy="0"/>
           </a:xfrm>
           <a:prstGeom prst="line">
             <a:avLst/>
@@ -3422,8 +3422,8 @@
         </p:nvSpPr>
         <p:spPr>
           <a:xfrm>
-            <a:off x="59354720000" y="22096730000"/>
-            <a:ext cx="10322560000" cy="7419340000"/>
+            <a:off x="4749800" y="1739900"/>
+            <a:ext cx="711200" cy="508000"/>
           </a:xfrm>
           <a:custGeom>
             <a:avLst/>
@@ -3432,24 +3432,24 @@
             <a:cxnLst/>
             <a:rect l="l" t="t" r="r" b="b"/>
             <a:pathLst>
-              <a:path w="812800" h="584200">
+              <a:path w="56" h="40">
                 <a:moveTo>
-                  <a:pt x="0" y="292100"/>
+                  <a:pt x="0" y="20"/>
                 </a:moveTo>
                 <a:lnTo>
                   <a:pt x="0" y="0"/>
                 </a:lnTo>
                 <a:lnTo>
-                  <a:pt x="812800" y="584200"/>
+                  <a:pt x="56" y="40"/>
                 </a:lnTo>
                 <a:lnTo>
-                  <a:pt x="812800" y="292100"/>
+                  <a:pt x="56" y="20"/>
                 </a:lnTo>
               </a:path>
             </a:pathLst>
           </a:custGeom>
           <a:noFill/>
-          <a:ln w="33020">
+          <a:ln w="28693">
             <a:solidFill>
               <a:srgbClr val="E4794A"/>
             </a:solidFill>
@@ -3486,8 +3486,8 @@
         </p:nvSpPr>
         <p:spPr>
           <a:xfrm>
-            <a:off x="4568190" y="2442210"/>
-            <a:ext cx="1023619" cy="297180"/>
+            <a:off x="4658027" y="2350796"/>
+            <a:ext cx="889490" cy="258239"/>
           </a:xfrm>
           <a:prstGeom prst="rect">
             <a:avLst/>
@@ -3503,7 +3503,7 @@
           <a:p>
             <a:pPr algn="ctr"/>
             <a:r>
-              <a:rPr sz="1300" b="1" i="0">
+              <a:rPr sz="1129" b="1" i="0">
                 <a:solidFill>
                   <a:srgbClr val="E4794A"/>
                 </a:solidFill>
@@ -3522,8 +3522,8 @@
         </p:nvSpPr>
         <p:spPr>
           <a:xfrm>
-            <a:off x="928624" y="2871470"/>
-            <a:ext cx="5889752" cy="251460"/>
+            <a:off x="1495369" y="2723808"/>
+            <a:ext cx="5117991" cy="218510"/>
           </a:xfrm>
           <a:prstGeom prst="rect">
             <a:avLst/>
@@ -3539,7 +3539,7 @@
           <a:p>
             <a:pPr algn="ctr"/>
             <a:r>
-              <a:rPr sz="1100" b="0" i="1">
+              <a:rPr sz="955" b="0" i="1">
                 <a:solidFill>
                   <a:srgbClr val="777777"/>
                 </a:solidFill>
@@ -3558,8 +3558,8 @@
         </p:nvSpPr>
         <p:spPr>
           <a:xfrm>
-            <a:off x="7366000" y="1096010"/>
-            <a:ext cx="3275584" cy="297180"/>
+            <a:off x="7089227" y="1180994"/>
+            <a:ext cx="2846369" cy="258239"/>
           </a:xfrm>
           <a:prstGeom prst="rect">
             <a:avLst/>
@@ -3575,7 +3575,7 @@
           <a:p>
             <a:pPr algn="l"/>
             <a:r>
-              <a:rPr sz="1300" b="1" i="0">
+              <a:rPr sz="1129" b="1" i="0">
                 <a:solidFill>
                   <a:srgbClr val="3F3F3F"/>
                 </a:solidFill>
@@ -3594,8 +3594,8 @@
         </p:nvSpPr>
         <p:spPr>
           <a:xfrm>
-            <a:off x="7366000" y="1437640"/>
-            <a:ext cx="3023616" cy="274320"/>
+            <a:off x="7089227" y="1477859"/>
+            <a:ext cx="2627418" cy="238374"/>
           </a:xfrm>
           <a:prstGeom prst="rect">
             <a:avLst/>
@@ -3611,7 +3611,7 @@
           <a:p>
             <a:pPr algn="l"/>
             <a:r>
-              <a:rPr sz="1200" b="0" i="0">
+              <a:rPr sz="1042" b="0" i="0">
                 <a:solidFill>
                   <a:srgbClr val="555555"/>
                 </a:solidFill>
@@ -3630,8 +3630,8 @@
         </p:nvSpPr>
         <p:spPr>
           <a:xfrm>
-            <a:off x="7366000" y="1678939"/>
-            <a:ext cx="3212592" cy="274320"/>
+            <a:off x="7089227" y="1687540"/>
+            <a:ext cx="2791631" cy="238374"/>
           </a:xfrm>
           <a:prstGeom prst="rect">
             <a:avLst/>
@@ -3647,7 +3647,7 @@
           <a:p>
             <a:pPr algn="l"/>
             <a:r>
-              <a:rPr sz="1200" b="0" i="0">
+              <a:rPr sz="1042" b="0" i="0">
                 <a:solidFill>
                   <a:srgbClr val="555555"/>
                 </a:solidFill>
@@ -3666,8 +3666,8 @@
         </p:nvSpPr>
         <p:spPr>
           <a:xfrm>
-            <a:off x="7366000" y="1920239"/>
-            <a:ext cx="3212592" cy="274320"/>
+            <a:off x="7089227" y="1897222"/>
+            <a:ext cx="2791631" cy="238374"/>
           </a:xfrm>
           <a:prstGeom prst="rect">
             <a:avLst/>
@@ -3683,7 +3683,7 @@
           <a:p>
             <a:pPr algn="l"/>
             <a:r>
-              <a:rPr sz="1200" b="0" i="0">
+              <a:rPr sz="1042" b="0" i="0">
                 <a:solidFill>
                   <a:srgbClr val="555555"/>
                 </a:solidFill>
@@ -3702,8 +3702,8 @@
         </p:nvSpPr>
         <p:spPr>
           <a:xfrm>
-            <a:off x="7366000" y="2161540"/>
-            <a:ext cx="3307079" cy="274320"/>
+            <a:off x="7089227" y="2106903"/>
+            <a:ext cx="2873738" cy="238374"/>
           </a:xfrm>
           <a:prstGeom prst="rect">
             <a:avLst/>
@@ -3719,7 +3719,7 @@
           <a:p>
             <a:pPr algn="l"/>
             <a:r>
-              <a:rPr sz="1200" b="0" i="0">
+              <a:rPr sz="1042" b="0" i="0">
                 <a:solidFill>
                   <a:srgbClr val="555555"/>
                 </a:solidFill>
@@ -3738,8 +3738,8 @@
         </p:nvSpPr>
         <p:spPr>
           <a:xfrm>
-            <a:off x="7366000" y="2402840"/>
-            <a:ext cx="3212592" cy="274320"/>
+            <a:off x="7089227" y="2316585"/>
+            <a:ext cx="2791631" cy="238374"/>
           </a:xfrm>
           <a:prstGeom prst="rect">
             <a:avLst/>
@@ -3755,7 +3755,7 @@
           <a:p>
             <a:pPr algn="l"/>
             <a:r>
-              <a:rPr sz="1200" b="0" i="0">
+              <a:rPr sz="1042" b="0" i="0">
                 <a:solidFill>
                   <a:srgbClr val="555555"/>
                 </a:solidFill>
@@ -3774,8 +3774,8 @@
         </p:nvSpPr>
         <p:spPr>
           <a:xfrm>
-            <a:off x="7366000" y="2644140"/>
-            <a:ext cx="2456688" cy="274320"/>
+            <a:off x="7089227" y="2526266"/>
+            <a:ext cx="2134777" cy="238374"/>
           </a:xfrm>
           <a:prstGeom prst="rect">
             <a:avLst/>
@@ -3791,7 +3791,7 @@
           <a:p>
             <a:pPr algn="l"/>
             <a:r>
-              <a:rPr sz="1200" b="0" i="0">
+              <a:rPr sz="1042" b="0" i="0">
                 <a:solidFill>
                   <a:srgbClr val="555555"/>
                 </a:solidFill>
@@ -3810,8 +3810,8 @@
         </p:nvSpPr>
         <p:spPr>
           <a:xfrm>
-            <a:off x="1408684" y="3672840"/>
-            <a:ext cx="661416" cy="274320"/>
+            <a:off x="1912525" y="3420171"/>
+            <a:ext cx="574747" cy="238374"/>
           </a:xfrm>
           <a:prstGeom prst="rect">
             <a:avLst/>
@@ -3827,7 +3827,7 @@
           <a:p>
             <a:pPr algn="r"/>
             <a:r>
-              <a:rPr sz="1200" b="1" i="0">
+              <a:rPr sz="1042" b="1" i="0">
                 <a:solidFill>
                   <a:srgbClr val="3F3F3F"/>
                 </a:solidFill>
@@ -3846,8 +3846,8 @@
         </p:nvSpPr>
         <p:spPr>
           <a:xfrm>
-            <a:off x="1408684" y="3863340"/>
-            <a:ext cx="661416" cy="274320"/>
+            <a:off x="1912525" y="3585709"/>
+            <a:ext cx="574747" cy="238374"/>
           </a:xfrm>
           <a:prstGeom prst="rect">
             <a:avLst/>
@@ -3863,7 +3863,7 @@
           <a:p>
             <a:pPr algn="r"/>
             <a:r>
-              <a:rPr sz="1200" b="1" i="0">
+              <a:rPr sz="1042" b="1" i="0">
                 <a:solidFill>
                   <a:srgbClr val="3F3F3F"/>
                 </a:solidFill>
@@ -3882,13 +3882,13 @@
         </p:nvCxnSpPr>
         <p:spPr>
           <a:xfrm>
-            <a:off x="2222500" y="3810000"/>
-            <a:ext cx="6565900" cy="0"/>
+            <a:off x="2619703" y="3539358"/>
+            <a:ext cx="5705541" cy="0"/>
           </a:xfrm>
           <a:prstGeom prst="line">
             <a:avLst/>
           </a:prstGeom>
-          <a:ln w="13970">
+          <a:ln w="12700">
             <a:solidFill>
               <a:srgbClr val="7C7C7C"/>
             </a:solidFill>
@@ -3917,8 +3917,8 @@
         </p:nvSpPr>
         <p:spPr>
           <a:xfrm>
-            <a:off x="33064450000" y="44193460000"/>
-            <a:ext cx="8709660000" cy="8387080000"/>
+            <a:off x="2946400" y="3251200"/>
+            <a:ext cx="596900" cy="571500"/>
           </a:xfrm>
           <a:custGeom>
             <a:avLst/>
@@ -3927,24 +3927,24 @@
             <a:cxnLst/>
             <a:rect l="l" t="t" r="r" b="b"/>
             <a:pathLst>
-              <a:path w="685800" h="660400">
+              <a:path w="47" h="45">
                 <a:moveTo>
-                  <a:pt x="0" y="330200"/>
+                  <a:pt x="0" y="23"/>
                 </a:moveTo>
                 <a:lnTo>
-                  <a:pt x="0" y="660400"/>
+                  <a:pt x="0" y="45"/>
                 </a:lnTo>
                 <a:lnTo>
-                  <a:pt x="685800" y="0"/>
+                  <a:pt x="47" y="0"/>
                 </a:lnTo>
                 <a:lnTo>
-                  <a:pt x="685800" y="330200"/>
+                  <a:pt x="47" y="23"/>
                 </a:lnTo>
               </a:path>
             </a:pathLst>
           </a:custGeom>
           <a:noFill/>
-          <a:ln w="33020">
+          <a:ln w="28693">
             <a:solidFill>
               <a:srgbClr val="4C78A8"/>
             </a:solidFill>
@@ -3981,8 +3981,8 @@
         </p:nvSpPr>
         <p:spPr>
           <a:xfrm>
-            <a:off x="52096670000" y="44193460000"/>
-            <a:ext cx="8709660000" cy="8387080000"/>
+            <a:off x="4254500" y="3251200"/>
+            <a:ext cx="596900" cy="571500"/>
           </a:xfrm>
           <a:custGeom>
             <a:avLst/>
@@ -3991,24 +3991,24 @@
             <a:cxnLst/>
             <a:rect l="l" t="t" r="r" b="b"/>
             <a:pathLst>
-              <a:path w="685800" h="660400">
+              <a:path w="47" h="45">
                 <a:moveTo>
-                  <a:pt x="0" y="330200"/>
+                  <a:pt x="0" y="23"/>
                 </a:moveTo>
                 <a:lnTo>
                   <a:pt x="0" y="0"/>
                 </a:lnTo>
                 <a:lnTo>
-                  <a:pt x="685800" y="660400"/>
+                  <a:pt x="47" y="45"/>
                 </a:lnTo>
                 <a:lnTo>
-                  <a:pt x="685800" y="330200"/>
+                  <a:pt x="47" y="23"/>
                 </a:lnTo>
               </a:path>
             </a:pathLst>
           </a:custGeom>
           <a:noFill/>
-          <a:ln w="33020">
+          <a:ln w="28693">
             <a:solidFill>
               <a:srgbClr val="E4794A"/>
             </a:solidFill>
@@ -4045,8 +4045,8 @@
         </p:nvSpPr>
         <p:spPr>
           <a:xfrm>
-            <a:off x="71128890000" y="44193460000"/>
-            <a:ext cx="8709660000" cy="8387080000"/>
+            <a:off x="5549900" y="3251200"/>
+            <a:ext cx="596900" cy="571500"/>
           </a:xfrm>
           <a:custGeom>
             <a:avLst/>
@@ -4055,24 +4055,24 @@
             <a:cxnLst/>
             <a:rect l="l" t="t" r="r" b="b"/>
             <a:pathLst>
-              <a:path w="685800" h="660400">
+              <a:path w="47" h="45">
                 <a:moveTo>
-                  <a:pt x="0" y="330200"/>
+                  <a:pt x="0" y="23"/>
                 </a:moveTo>
                 <a:lnTo>
-                  <a:pt x="0" y="660400"/>
+                  <a:pt x="0" y="45"/>
                 </a:lnTo>
                 <a:lnTo>
-                  <a:pt x="685800" y="0"/>
+                  <a:pt x="47" y="0"/>
                 </a:lnTo>
                 <a:lnTo>
-                  <a:pt x="685800" y="330200"/>
+                  <a:pt x="47" y="23"/>
                 </a:lnTo>
               </a:path>
             </a:pathLst>
           </a:custGeom>
           <a:noFill/>
-          <a:ln w="33020">
+          <a:ln w="28693">
             <a:solidFill>
               <a:srgbClr val="4C78A8"/>
             </a:solidFill>
@@ -4109,8 +4109,8 @@
         </p:nvSpPr>
         <p:spPr>
           <a:xfrm>
-            <a:off x="6565900" y="3378200"/>
-            <a:ext cx="2222500" cy="863600"/>
+            <a:off x="6393968" y="3164139"/>
+            <a:ext cx="1931275" cy="750438"/>
           </a:xfrm>
           <a:prstGeom prst="rect">
             <a:avLst/>
@@ -4155,8 +4155,8 @@
         </p:nvSpPr>
         <p:spPr>
           <a:xfrm>
-            <a:off x="7423150" y="3495040"/>
-            <a:ext cx="508000" cy="274320"/>
+            <a:off x="7138888" y="3265669"/>
+            <a:ext cx="441434" cy="238374"/>
           </a:xfrm>
           <a:prstGeom prst="rect">
             <a:avLst/>
@@ -4172,7 +4172,7 @@
           <a:p>
             <a:pPr algn="ctr"/>
             <a:r>
-              <a:rPr sz="1200" b="1" i="0">
+              <a:rPr sz="1042" b="1" i="0">
                 <a:solidFill>
                   <a:srgbClr val="888888"/>
                 </a:solidFill>
@@ -4191,13 +4191,13 @@
         </p:nvCxnSpPr>
         <p:spPr>
           <a:xfrm>
-            <a:off x="9169400" y="3302000"/>
-            <a:ext cx="0" cy="1016000"/>
+            <a:off x="8656320" y="3097924"/>
+            <a:ext cx="0" cy="882869"/>
           </a:xfrm>
           <a:prstGeom prst="line">
             <a:avLst/>
           </a:prstGeom>
-          <a:ln w="20320">
+          <a:ln w="17657">
             <a:solidFill>
               <a:srgbClr val="336633"/>
             </a:solidFill>
@@ -4227,8 +4227,8 @@
         </p:nvSpPr>
         <p:spPr>
           <a:xfrm>
-            <a:off x="8885936" y="3037840"/>
-            <a:ext cx="566928" cy="274320"/>
+            <a:off x="8409999" y="2868378"/>
+            <a:ext cx="492640" cy="238374"/>
           </a:xfrm>
           <a:prstGeom prst="rect">
             <a:avLst/>
@@ -4244,7 +4244,7 @@
           <a:p>
             <a:pPr algn="ctr"/>
             <a:r>
-              <a:rPr sz="1200" b="1" i="0">
+              <a:rPr sz="1042" b="1" i="0">
                 <a:solidFill>
                   <a:srgbClr val="336633"/>
                 </a:solidFill>
@@ -4263,13 +4263,13 @@
         </p:nvCxnSpPr>
         <p:spPr>
           <a:xfrm>
-            <a:off x="2222500" y="4470400"/>
-            <a:ext cx="6642100" cy="0"/>
+            <a:off x="2619703" y="4113223"/>
+            <a:ext cx="5771756" cy="0"/>
           </a:xfrm>
           <a:prstGeom prst="line">
             <a:avLst/>
           </a:prstGeom>
-          <a:ln w="16510">
+          <a:ln w="14346">
             <a:solidFill>
               <a:srgbClr val="7C7C7C"/>
             </a:solidFill>
@@ -4299,8 +4299,8 @@
         </p:nvSpPr>
         <p:spPr>
           <a:xfrm>
-            <a:off x="8940800" y="4333240"/>
-            <a:ext cx="508000" cy="274320"/>
+            <a:off x="8457674" y="3994036"/>
+            <a:ext cx="441434" cy="238374"/>
           </a:xfrm>
           <a:prstGeom prst="rect">
             <a:avLst/>
@@ -4316,7 +4316,7 @@
           <a:p>
             <a:pPr algn="l"/>
             <a:r>
-              <a:rPr sz="1200" b="0" i="0">
+              <a:rPr sz="1042" b="0" i="0">
                 <a:solidFill>
                   <a:srgbClr val="888888"/>
                 </a:solidFill>
@@ -4335,13 +4335,13 @@
         </p:nvCxnSpPr>
         <p:spPr>
           <a:xfrm>
-            <a:off x="2603500" y="4572000"/>
-            <a:ext cx="0" cy="711200"/>
+            <a:off x="2950779" y="4201510"/>
+            <a:ext cx="0" cy="618008"/>
           </a:xfrm>
           <a:prstGeom prst="line">
             <a:avLst/>
           </a:prstGeom>
-          <a:ln w="17780">
+          <a:ln w="15450">
             <a:solidFill>
               <a:srgbClr val="7C7C7C"/>
             </a:solidFill>
@@ -4371,8 +4371,8 @@
         </p:nvSpPr>
         <p:spPr>
           <a:xfrm>
-            <a:off x="889000" y="5334000"/>
-            <a:ext cx="3429000" cy="1092200"/>
+            <a:off x="1460937" y="4863662"/>
+            <a:ext cx="2979682" cy="949084"/>
           </a:xfrm>
           <a:prstGeom prst="roundRect">
             <a:avLst/>
@@ -4380,7 +4380,7 @@
           <a:solidFill>
             <a:srgbClr val="DDEEFF"/>
           </a:solidFill>
-          <a:ln w="20320">
+          <a:ln w="17657">
             <a:solidFill>
               <a:srgbClr val="335577"/>
             </a:solidFill>
@@ -4417,8 +4417,8 @@
         </p:nvSpPr>
         <p:spPr>
           <a:xfrm>
-            <a:off x="1274762" y="5459095"/>
-            <a:ext cx="2657475" cy="308610"/>
+            <a:off x="1796152" y="4972365"/>
+            <a:ext cx="2309254" cy="268171"/>
           </a:xfrm>
           <a:prstGeom prst="rect">
             <a:avLst/>
@@ -4434,7 +4434,7 @@
           <a:p>
             <a:pPr algn="ctr"/>
             <a:r>
-              <a:rPr sz="1350" b="1" i="0">
+              <a:rPr sz="1173" b="1" i="0">
                 <a:solidFill>
                   <a:srgbClr val="3F3F3F"/>
                 </a:solidFill>
@@ -4453,8 +4453,8 @@
         </p:nvSpPr>
         <p:spPr>
           <a:xfrm>
-            <a:off x="1274762" y="5749925"/>
-            <a:ext cx="2657475" cy="285750"/>
+            <a:off x="1796152" y="5225086"/>
+            <a:ext cx="2309254" cy="248306"/>
           </a:xfrm>
           <a:prstGeom prst="rect">
             <a:avLst/>
@@ -4470,7 +4470,7 @@
           <a:p>
             <a:pPr algn="ctr"/>
             <a:r>
-              <a:rPr sz="1250" b="0" i="0">
+              <a:rPr sz="1086" b="0" i="0">
                 <a:solidFill>
                   <a:srgbClr val="3F3F3F"/>
                 </a:solidFill>
@@ -4489,8 +4489,8 @@
         </p:nvSpPr>
         <p:spPr>
           <a:xfrm>
-            <a:off x="1477518" y="6033770"/>
-            <a:ext cx="2251964" cy="251460"/>
+            <a:off x="1972339" y="5471738"/>
+            <a:ext cx="1956879" cy="218510"/>
           </a:xfrm>
           <a:prstGeom prst="rect">
             <a:avLst/>
@@ -4506,7 +4506,7 @@
           <a:p>
             <a:pPr algn="ctr"/>
             <a:r>
-              <a:rPr sz="1100" b="0" i="1">
+              <a:rPr sz="955" b="0" i="1">
                 <a:solidFill>
                   <a:srgbClr val="666666"/>
                 </a:solidFill>
@@ -4525,8 +4525,8 @@
         </p:nvSpPr>
         <p:spPr>
           <a:xfrm>
-            <a:off x="4826000" y="5334000"/>
-            <a:ext cx="3429000" cy="1092200"/>
+            <a:off x="4882055" y="4863662"/>
+            <a:ext cx="2979682" cy="949084"/>
           </a:xfrm>
           <a:prstGeom prst="roundRect">
             <a:avLst/>
@@ -4534,7 +4534,7 @@
           <a:solidFill>
             <a:srgbClr val="EEE0FF"/>
           </a:solidFill>
-          <a:ln w="20320">
+          <a:ln w="17657">
             <a:solidFill>
               <a:srgbClr val="553388"/>
             </a:solidFill>
@@ -4571,8 +4571,8 @@
         </p:nvSpPr>
         <p:spPr>
           <a:xfrm>
-            <a:off x="5211762" y="5459095"/>
-            <a:ext cx="2657475" cy="308610"/>
+            <a:off x="5217269" y="4972365"/>
+            <a:ext cx="2309254" cy="268171"/>
           </a:xfrm>
           <a:prstGeom prst="rect">
             <a:avLst/>
@@ -4588,7 +4588,7 @@
           <a:p>
             <a:pPr algn="ctr"/>
             <a:r>
-              <a:rPr sz="1350" b="1" i="0">
+              <a:rPr sz="1173" b="1" i="0">
                 <a:solidFill>
                   <a:srgbClr val="3F3F3F"/>
                 </a:solidFill>
@@ -4607,8 +4607,8 @@
         </p:nvSpPr>
         <p:spPr>
           <a:xfrm>
-            <a:off x="5260975" y="5749925"/>
-            <a:ext cx="2559050" cy="285750"/>
+            <a:off x="5260033" y="5225086"/>
+            <a:ext cx="2223726" cy="248306"/>
           </a:xfrm>
           <a:prstGeom prst="rect">
             <a:avLst/>
@@ -4624,7 +4624,7 @@
           <a:p>
             <a:pPr algn="ctr"/>
             <a:r>
-              <a:rPr sz="1250" b="0" i="0">
+              <a:rPr sz="1086" b="0" i="0">
                 <a:solidFill>
                   <a:srgbClr val="3F3F3F"/>
                 </a:solidFill>
@@ -4643,8 +4643,8 @@
         </p:nvSpPr>
         <p:spPr>
           <a:xfrm>
-            <a:off x="6107430" y="6033770"/>
-            <a:ext cx="866140" cy="251460"/>
+            <a:off x="5995573" y="5471738"/>
+            <a:ext cx="752645" cy="218510"/>
           </a:xfrm>
           <a:prstGeom prst="rect">
             <a:avLst/>
@@ -4660,7 +4660,7 @@
           <a:p>
             <a:pPr algn="ctr"/>
             <a:r>
-              <a:rPr sz="1100" b="0" i="1">
+              <a:rPr sz="955" b="0" i="1">
                 <a:solidFill>
                   <a:srgbClr val="666666"/>
                 </a:solidFill>
@@ -4679,8 +4679,8 @@
         </p:nvSpPr>
         <p:spPr>
           <a:xfrm>
-            <a:off x="8890000" y="5334000"/>
-            <a:ext cx="2667000" cy="1092200"/>
+            <a:off x="8413531" y="4863662"/>
+            <a:ext cx="2317531" cy="949084"/>
           </a:xfrm>
           <a:prstGeom prst="roundRect">
             <a:avLst/>
@@ -4688,7 +4688,7 @@
           <a:solidFill>
             <a:srgbClr val="FFFFFF"/>
           </a:solidFill>
-          <a:ln w="20320">
+          <a:ln w="17657">
             <a:solidFill>
               <a:srgbClr val="3F3F3F"/>
             </a:solidFill>
@@ -4725,8 +4725,8 @@
         </p:nvSpPr>
         <p:spPr>
           <a:xfrm>
-            <a:off x="9904603" y="5509895"/>
-            <a:ext cx="637794" cy="308610"/>
+            <a:off x="9295186" y="5016508"/>
+            <a:ext cx="554220" cy="268171"/>
           </a:xfrm>
           <a:prstGeom prst="rect">
             <a:avLst/>
@@ -4742,7 +4742,7 @@
           <a:p>
             <a:pPr algn="ctr"/>
             <a:r>
-              <a:rPr sz="1350" b="1" i="0">
+              <a:rPr sz="1173" b="1" i="0">
                 <a:solidFill>
                   <a:srgbClr val="3F3F3F"/>
                 </a:solidFill>
@@ -4761,8 +4761,8 @@
         </p:nvSpPr>
         <p:spPr>
           <a:xfrm>
-            <a:off x="9455785" y="5845810"/>
-            <a:ext cx="1535430" cy="297180"/>
+            <a:off x="8905178" y="5308407"/>
+            <a:ext cx="1334235" cy="258239"/>
           </a:xfrm>
           <a:prstGeom prst="rect">
             <a:avLst/>
@@ -4778,7 +4778,7 @@
           <a:p>
             <a:pPr algn="ctr"/>
             <a:r>
-              <a:rPr sz="1300" b="1" i="0">
+              <a:rPr sz="1129" b="1" i="0">
                 <a:solidFill>
                   <a:srgbClr val="336633"/>
                 </a:solidFill>
@@ -4797,8 +4797,8 @@
         </p:nvSpPr>
         <p:spPr>
           <a:xfrm>
-            <a:off x="9877044" y="6097270"/>
-            <a:ext cx="692912" cy="251460"/>
+            <a:off x="9271238" y="5526917"/>
+            <a:ext cx="602116" cy="218510"/>
           </a:xfrm>
           <a:prstGeom prst="rect">
             <a:avLst/>
@@ -4814,7 +4814,7 @@
           <a:p>
             <a:pPr algn="ctr"/>
             <a:r>
-              <a:rPr sz="1100" b="0" i="0">
+              <a:rPr sz="955" b="0" i="0">
                 <a:solidFill>
                   <a:srgbClr val="336633"/>
                 </a:solidFill>
@@ -4833,13 +4833,13 @@
         </p:nvCxnSpPr>
         <p:spPr>
           <a:xfrm>
-            <a:off x="4368800" y="5880100"/>
-            <a:ext cx="406400" cy="0"/>
+            <a:off x="4484764" y="5338204"/>
+            <a:ext cx="353147" cy="0"/>
           </a:xfrm>
           <a:prstGeom prst="line">
             <a:avLst/>
           </a:prstGeom>
-          <a:ln w="20320">
+          <a:ln w="17657">
             <a:solidFill>
               <a:srgbClr val="7C7C7C"/>
             </a:solidFill>
@@ -4869,13 +4869,13 @@
         </p:nvCxnSpPr>
         <p:spPr>
           <a:xfrm>
-            <a:off x="8305800" y="5880100"/>
-            <a:ext cx="533400" cy="0"/>
+            <a:off x="7905881" y="5338204"/>
+            <a:ext cx="463506" cy="0"/>
           </a:xfrm>
           <a:prstGeom prst="line">
             <a:avLst/>
           </a:prstGeom>
-          <a:ln w="20320">
+          <a:ln w="17657">
             <a:solidFill>
               <a:srgbClr val="7C7C7C"/>
             </a:solidFill>
@@ -4905,8 +4905,8 @@
         </p:nvSpPr>
         <p:spPr>
           <a:xfrm>
-            <a:off x="1203325" y="6715125"/>
-            <a:ext cx="10039350" cy="285750"/>
+            <a:off x="1734075" y="6063812"/>
+            <a:ext cx="8723848" cy="248306"/>
           </a:xfrm>
           <a:prstGeom prst="rect">
             <a:avLst/>
@@ -4922,7 +4922,7 @@
           <a:p>
             <a:pPr algn="ctr"/>
             <a:r>
-              <a:rPr sz="1250" b="0" i="1">
+              <a:rPr sz="1086" b="0" i="1">
                 <a:solidFill>
                   <a:srgbClr val="555555"/>
                 </a:solidFill>
